--- a/decks/hist-civil-rights/hist-civil-rights_ch3_fighting-1950s.pptx
+++ b/decks/hist-civil-rights/hist-civil-rights_ch3_fighting-1950s.pptx
@@ -129,30 +129,30 @@
   <p:extLst>
     <p:ext uri="{521415D9-36F7-43E2-AB2F-B90AF26B5E84}">
       <p14:sectionLst xmlns:p14="http://schemas.microsoft.com/office/powerpoint/2010/main">
-        <p14:section name="Opening" id="{69e5f2e2-baad-4f7a-a002-34692916cac8}">
+        <p14:section name="Opening" id="{e9c37980-31bd-32d7-afec-c2c85efe1679}">
           <p14:sldIdLst>
             <p14:sldId id="256"/>
           </p14:sldIdLst>
         </p14:section>
-        <p14:section name="Gate" id="{b8fe25f3-3018-8fee-c2cb-db5c66748345}">
+        <p14:section name="Gate" id="{b684abe0-d572-50d6-876f-54a9d40c7a2b}">
           <p14:sldIdLst>
             <p14:sldId id="257"/>
             <p14:sldId id="258"/>
           </p14:sldIdLst>
         </p14:section>
-        <p14:section name="Pre-teach" id="{05e932c5-4b7d-a08f-9616-551e134faa9e}">
+        <p14:section name="Pre-teach" id="{b2f85d80-cf7d-a0a5-1cee-cf25ca636c61}">
           <p14:sldIdLst>
             <p14:sldId id="259"/>
             <p14:sldId id="260"/>
           </p14:sldIdLst>
         </p14:section>
-        <p14:section name="Read-along" id="{46014184-0043-1396-da85-aa1ff5f7f256}">
+        <p14:section name="Read-along" id="{0e3fe6a3-20e6-3bc7-d98e-e8ddaefff823}">
           <p14:sldIdLst>
             <p14:sldId id="261"/>
             <p14:sldId id="262"/>
           </p14:sldIdLst>
         </p14:section>
-        <p14:section name="Teach" id="{7b1ab0b9-2390-02b1-ed43-1fd139393f5c}">
+        <p14:section name="Teach" id="{fdc6630d-3d73-1013-6510-0613c2a8b6fc}">
           <p14:sldIdLst>
             <p14:sldId id="263"/>
             <p14:sldId id="264"/>
@@ -162,7 +162,7 @@
             <p14:sldId id="268"/>
           </p14:sldIdLst>
         </p14:section>
-        <p14:section name="Routes" id="{dae02a26-6369-5ae8-e418-475b2036314b}">
+        <p14:section name="Routes" id="{47f8a7b0-cccc-05f5-3833-3faa553c4a35}">
           <p14:sldIdLst>
             <p14:sldId id="269"/>
             <p14:sldId id="270"/>
@@ -171,12 +171,12 @@
             <p14:sldId id="273"/>
           </p14:sldIdLst>
         </p14:section>
-        <p14:section name="Close" id="{39eb11ea-9655-82c7-ecb4-5255b79449de}">
+        <p14:section name="Close" id="{2522a00c-4c80-460f-72d3-d3f2fdc20983}">
           <p14:sldIdLst>
             <p14:sldId id="274"/>
           </p14:sldIdLst>
         </p14:section>
-        <p14:section name="Answers" id="{cd000294-b7c2-cfbd-a119-24d626949ed3}">
+        <p14:section name="Answers" id="{4bf98a03-0dc7-6850-3183-8c4d7dc41578}">
           <p14:sldIdLst>
             <p14:sldId id="275"/>
             <p14:sldId id="276"/>
@@ -682,7 +682,7 @@
               <a:t>Teach — Rosa Parks and the Montgomery Bus Boycott. Say it in your own words, then check understanding with a quick question: ask a pupil from the pre-teach group first, since they met these words and ideas before the lesson. Pupils try to recall before you re-explain.
 Rosa Parks lived in Alabama, a Southern state whose laws promoted segregation. In Montgomery, the front seats on the buses were reserved for white passengers. Parks was not a bystander who happened to be tired: she had been active in the Civil Rights movement since 1943, when she became the secretary of her local NAACP branch.
 On 1 December 1955 she refused to give up her seat, and she was arrested. The Civil Rights movement in Montgomery answered on 5 December 1955 by starting a bus boycott: Black residents refused to ride the buses at all until segregation on them ended. Because Black passengers paid a large share of the bus companies' income, the boycott bit hard, and the companies came close to bankruptcy. It held for more than a year, until 20 December 1956, with people walking, sharing cars and organising lifts the whole time.
-Two things came out of it besides desegregated buses. Rosa Parks became known as the mother of the Civil Rights movement and a role model for African Americans. And a young local minister, Martin Luther King, became a national leader during the campaign. The boycott is also usually counted as the start of non-violent direct action: Black Americans doing something themselves, peacefully, to secure their civil rights.
+Two things came out of it besides desegregated buses. Rosa Parks is often called the mother of the Civil Rights movement, and she became a role model for African Americans. And a young local minister, Martin Luther King, became a national leader during the campaign. The boycott is also usually counted as the start of non-violent direct action: Black Americans doing something themselves, peacefully, to secure their civil rights.
 Worked example — model it step by step, thinking aloud: How significant was the Montgomery Bus Boycott? Write the opening of a PEE paragraph. (1) Point: the Montgomery Bus Boycott, from 1955 to 1956, was a significant moment in the Civil Rights movement. (2) Evidence: Black residents stayed off the buses for over a year, the companies nearly went bankrupt, and segregation on Montgomery's buses was ended. (3) Explain: this shows the boycott was significant because it proved that organised, peaceful action by Black Americans could force a change in the law. (4) Now add the other side, because the question says how significant: however, the win was local, and it changed only the buses in one city. Answer: Point, evidence, explain, then the counter-argument: an organised year-long boycott desegregated Montgomery's buses and proved non-violent direct action worked, but the victory itself covered only one city's buses..
 Tip: In a significance question, never write only the strong side. Give your judgement, the evidence for it, and then the strongest argument against it.</a:t>
             </a:r>
@@ -775,7 +775,7 @@
               <a:t>Teach — Rosa Parks and the Montgomery Bus Boycott. Say it in your own words, then check understanding with a quick question: ask a pupil from the pre-teach group first, since they met these words and ideas before the lesson. Pupils try to recall before you re-explain.
 Rosa Parks lived in Alabama, a Southern state whose laws promoted segregation. In Montgomery, the front seats on the buses were reserved for white passengers. Parks was not a bystander who happened to be tired: she had been active in the Civil Rights movement since 1943, when she became the secretary of her local NAACP branch.
 On 1 December 1955 she refused to give up her seat, and she was arrested. The Civil Rights movement in Montgomery answered on 5 December 1955 by starting a bus boycott: Black residents refused to ride the buses at all until segregation on them ended. Because Black passengers paid a large share of the bus companies' income, the boycott bit hard, and the companies came close to bankruptcy. It held for more than a year, until 20 December 1956, with people walking, sharing cars and organising lifts the whole time.
-Two things came out of it besides desegregated buses. Rosa Parks became known as the mother of the Civil Rights movement and a role model for African Americans. And a young local minister, Martin Luther King, became a national leader during the campaign. The boycott is also usually counted as the start of non-violent direct action: Black Americans doing something themselves, peacefully, to secure their civil rights.
+Two things came out of it besides desegregated buses. Rosa Parks is often called the mother of the Civil Rights movement, and she became a role model for African Americans. And a young local minister, Martin Luther King, became a national leader during the campaign. The boycott is also usually counted as the start of non-violent direct action: Black Americans doing something themselves, peacefully, to secure their civil rights.
 Worked example — model it step by step, thinking aloud: How significant was the Montgomery Bus Boycott? Write the opening of a PEE paragraph. (1) Point: the Montgomery Bus Boycott, from 1955 to 1956, was a significant moment in the Civil Rights movement. (2) Evidence: Black residents stayed off the buses for over a year, the companies nearly went bankrupt, and segregation on Montgomery's buses was ended. (3) Explain: this shows the boycott was significant because it proved that organised, peaceful action by Black Americans could force a change in the law. (4) Now add the other side, because the question says how significant: however, the win was local, and it changed only the buses in one city. Answer: Point, evidence, explain, then the counter-argument: an organised year-long boycott desegregated Montgomery's buses and proved non-violent direct action worked, but the victory itself covered only one city's buses..
 Tip: In a significance question, never write only the strong side. Give your judgement, the evidence for it, and then the strongest argument against it.</a:t>
             </a:r>
@@ -959,7 +959,7 @@
               <a:rPr lang="en-US" dirty="0"/>
               <a:t>Teach — The Little Rock Nine. Say it in your own words, then check understanding with a quick question: ask a pupil from the pre-teach group first, since they met these words and ideas before the lesson. Pupils try to recall before you re-explain.
 The Little Rock Nine were nine students trying to go to high school in Arkansas, another Southern state. Segregation had existed in Southern schools for many years under separate but equal, and in practice Black schools received very poor levels of education. The 1954 Supreme Court ruling changed the law, but changing the law is not the same as opening the door.
-In 1957 the Little Rock Board of Education and the local NAACP decided to integrate white and Black pupils at last. It was not a straightforward task. The local government and local people did not welcome the students, and in the end the President had to send in the Army so that nine teenagers could get into their lessons.
+In 1957 the local NAACP and the Little Rock Board of Education agreed at last to integrate the city's white high school, teaching white and Black pupils together. It was not a straightforward task. The local government and local people did not welcome the students, and in the end the President had to send in the Army so that nine teenagers could get into their lessons.
 That is why the Little Rock Nine matter twice over. What they achieved was the first integration of a Southern high school. What they represented was proof that Black Americans would use the new law, and that the federal government could be made to enforce it against a state that refused.
 Tip: When you compare Rosa Parks with the Little Rock Nine, compare like with like: what each achieved, who each forced to act, and how far the win reached.</a:t>
             </a:r>
@@ -2638,7 +2638,7 @@
               <a:t>Teach — Rosa Parks and the Montgomery Bus Boycott. Say it in your own words, then check understanding with a quick question: ask a pupil from the pre-teach group first, since they met these words and ideas before the lesson. Pupils try to recall before you re-explain.
 Rosa Parks lived in Alabama, a Southern state whose laws promoted segregation. In Montgomery, the front seats on the buses were reserved for white passengers. Parks was not a bystander who happened to be tired: she had been active in the Civil Rights movement since 1943, when she became the secretary of her local NAACP branch.
 On 1 December 1955 she refused to give up her seat, and she was arrested. The Civil Rights movement in Montgomery answered on 5 December 1955 by starting a bus boycott: Black residents refused to ride the buses at all until segregation on them ended. Because Black passengers paid a large share of the bus companies' income, the boycott bit hard, and the companies came close to bankruptcy. It held for more than a year, until 20 December 1956, with people walking, sharing cars and organising lifts the whole time.
-Two things came out of it besides desegregated buses. Rosa Parks became known as the mother of the Civil Rights movement and a role model for African Americans. And a young local minister, Martin Luther King, became a national leader during the campaign. The boycott is also usually counted as the start of non-violent direct action: Black Americans doing something themselves, peacefully, to secure their civil rights.
+Two things came out of it besides desegregated buses. Rosa Parks is often called the mother of the Civil Rights movement, and she became a role model for African Americans. And a young local minister, Martin Luther King, became a national leader during the campaign. The boycott is also usually counted as the start of non-violent direct action: Black Americans doing something themselves, peacefully, to secure their civil rights.
 Worked example — model it step by step, thinking aloud: How significant was the Montgomery Bus Boycott? Write the opening of a PEE paragraph. (1) Point: the Montgomery Bus Boycott, from 1955 to 1956, was a significant moment in the Civil Rights movement. (2) Evidence: Black residents stayed off the buses for over a year, the companies nearly went bankrupt, and segregation on Montgomery's buses was ended. (3) Explain: this shows the boycott was significant because it proved that organised, peaceful action by Black Americans could force a change in the law. (4) Now add the other side, because the question says how significant: however, the win was local, and it changed only the buses in one city. Answer: Point, evidence, explain, then the counter-argument: an organised year-long boycott desegregated Montgomery's buses and proved non-violent direct action worked, but the victory itself covered only one city's buses..
 Tip: In a significance question, never write only the strong side. Give your judgement, the evidence for it, and then the strongest argument against it.</a:t>
             </a:r>
@@ -6416,7 +6416,7 @@
               <a:buNone/>
             </a:pPr>
             <a:r>
-              <a:rPr lang="en-US" sz="2400" dirty="0">
+              <a:rPr lang="en-US" sz="2200" dirty="0">
                 <a:solidFill>
                   <a:srgbClr val="1E2229"/>
                 </a:solidFill>
@@ -6426,7 +6426,7 @@
               </a:rPr>
               <a:t>The Little Rock Nine were nine students trying to go to high school in Arkansas, another Southern state.</a:t>
             </a:r>
-            <a:endParaRPr lang="en-US" sz="2400" dirty="0"/>
+            <a:endParaRPr lang="en-US" sz="2200" dirty="0"/>
           </a:p>
         </p:txBody>
       </p:sp>
@@ -6536,7 +6536,7 @@
               <a:buNone/>
             </a:pPr>
             <a:r>
-              <a:rPr lang="en-US" sz="2400" dirty="0">
+              <a:rPr lang="en-US" sz="2200" dirty="0">
                 <a:solidFill>
                   <a:srgbClr val="1E2229"/>
                 </a:solidFill>
@@ -6544,9 +6544,9 @@
                 <a:ea typeface="Calibri" pitchFamily="34" charset="-122"/>
                 <a:cs typeface="Calibri" pitchFamily="34" charset="-120"/>
               </a:rPr>
-              <a:t>In 1957 the Little Rock Board of Education and the local NAACP decided to integrate white and Black pupils at last.</a:t>
-            </a:r>
-            <a:endParaRPr lang="en-US" sz="2400" dirty="0"/>
+              <a:t>In 1957 the local NAACP and the Little Rock Board of Education agreed at last to integrate the city's white high school, teaching white and Black pupils together.</a:t>
+            </a:r>
+            <a:endParaRPr lang="en-US" sz="2200" dirty="0"/>
           </a:p>
         </p:txBody>
       </p:sp>
@@ -6656,7 +6656,7 @@
               <a:buNone/>
             </a:pPr>
             <a:r>
-              <a:rPr lang="en-US" sz="2400" dirty="0">
+              <a:rPr lang="en-US" sz="2200" dirty="0">
                 <a:solidFill>
                   <a:srgbClr val="1E2229"/>
                 </a:solidFill>
@@ -6666,7 +6666,7 @@
               </a:rPr>
               <a:t>That is why the Little Rock Nine matter twice over.</a:t>
             </a:r>
-            <a:endParaRPr lang="en-US" sz="2400" dirty="0"/>
+            <a:endParaRPr lang="en-US" sz="2200" dirty="0"/>
           </a:p>
         </p:txBody>
       </p:sp>
@@ -18423,7 +18423,7 @@
                 <a:ea typeface="Calibri" pitchFamily="34" charset="-122"/>
                 <a:cs typeface="Calibri" pitchFamily="34" charset="-120"/>
               </a:rPr>
-              <a:t>Two things came out of it besides desegregated buses. Rosa Parks became known as the mother of the Civil Rights movement and a role model for African Americans.</a:t>
+              <a:t>Two things came out of it besides desegregated buses. Rosa Parks is often called the mother of the Civil Rights movement, and she became a role model for African Americans.</a:t>
             </a:r>
             <a:endParaRPr lang="en-US" sz="2000" dirty="0"/>
           </a:p>
